--- a/dist/초3/수학/자연수계산/초3_수학_자연수계산_07_두자리수×두자리수_학생용.pptx
+++ b/dist/초3/수학/자연수계산/초3_수학_자연수계산_07_두자리수×두자리수_학생용.pptx
@@ -119,13 +119,13 @@
   <p:extLst>
     <p:ext uri="{521415D9-36F7-43E2-AB2F-B90AF26B5E84}">
       <p14:sectionLst xmlns:p14="http://schemas.microsoft.com/office/powerpoint/2010/main">
-        <p14:section name="도입" id="{a826b5b6-7cfe-2f4c-6bd3-3187dc0d9389}">
+        <p14:section name="도입" id="{3723642a-4c41-a8df-2944-793a91fc3bd0}">
           <p14:sldIdLst>
             <p14:sldId id="256"/>
             <p14:sldId id="257"/>
           </p14:sldIdLst>
         </p14:section>
-        <p14:section name="개념" id="{a74d05ea-c33b-b49a-27ba-850d23227cba}">
+        <p14:section name="개념" id="{e35f1697-fd53-bf8e-3f6a-d2a8da7b8096}">
           <p14:sldIdLst>
             <p14:sldId id="258"/>
             <p14:sldId id="259"/>
@@ -133,31 +133,31 @@
             <p14:sldId id="262"/>
           </p14:sldIdLst>
         </p14:section>
-        <p14:section name="연습" id="{53ac7b61-ca09-afdb-9f73-7dc3599237bd}">
+        <p14:section name="연습" id="{f92b8a44-402e-b02a-9b07-30288488e2bf}">
           <p14:sldIdLst>
             <p14:sldId id="260"/>
             <p14:sldId id="263"/>
             <p14:sldId id="264"/>
           </p14:sldIdLst>
         </p14:section>
-        <p14:section name="개념" id="{94501785-c2c0-56ab-8f73-42d0cbcb6603}">
+        <p14:section name="개념" id="{34280aa6-81ef-88e2-cb01-a447b0f24f56}">
           <p14:sldIdLst/>
         </p14:section>
-        <p14:section name="연습" id="{cb8f4f51-fc69-9fd3-555e-8a15f4ab8616}">
+        <p14:section name="연습" id="{eb71dbde-6e11-397b-acb4-74d361dade2f}">
           <p14:sldIdLst/>
         </p14:section>
-        <p14:section name="확인" id="{ee620418-5ae4-87f0-3281-3e0e584bc0ec}">
+        <p14:section name="확인" id="{89f7c0c6-7ff7-6a57-a54a-e0c32039b948}">
           <p14:sldIdLst>
             <p14:sldId id="265"/>
             <p14:sldId id="266"/>
           </p14:sldIdLst>
         </p14:section>
-        <p14:section name="정리" id="{8065e173-9893-cc04-eedc-aff5d54a992d}">
+        <p14:section name="정리" id="{44556bc3-71b0-b5eb-7c6d-1eec8b16ea18}">
           <p14:sldIdLst>
             <p14:sldId id="267"/>
           </p14:sldIdLst>
         </p14:section>
-        <p14:section name="보충" id="{5be1f1b5-0883-e3ce-81cf-84da46def4f8}">
+        <p14:section name="보충" id="{863cc80d-330d-31b1-3c09-b0b43ff492c6}">
           <p14:sldIdLst>
             <p14:sldId id="268"/>
           </p14:sldIdLst>

--- a/dist/초3/수학/자연수계산/초3_수학_자연수계산_07_두자리수×두자리수_학생용.pptx
+++ b/dist/초3/수학/자연수계산/초3_수학_자연수계산_07_두자리수×두자리수_학생용.pptx
@@ -119,13 +119,13 @@
   <p:extLst>
     <p:ext uri="{521415D9-36F7-43E2-AB2F-B90AF26B5E84}">
       <p14:sectionLst xmlns:p14="http://schemas.microsoft.com/office/powerpoint/2010/main">
-        <p14:section name="도입" id="{3723642a-4c41-a8df-2944-793a91fc3bd0}">
+        <p14:section name="도입" id="{7d5dbf11-789a-991a-288a-104874eddff2}">
           <p14:sldIdLst>
             <p14:sldId id="256"/>
             <p14:sldId id="257"/>
           </p14:sldIdLst>
         </p14:section>
-        <p14:section name="개념" id="{e35f1697-fd53-bf8e-3f6a-d2a8da7b8096}">
+        <p14:section name="개념" id="{28ba1b72-291e-86a2-4978-d8a636c1411b}">
           <p14:sldIdLst>
             <p14:sldId id="258"/>
             <p14:sldId id="259"/>
@@ -133,31 +133,31 @@
             <p14:sldId id="262"/>
           </p14:sldIdLst>
         </p14:section>
-        <p14:section name="연습" id="{f92b8a44-402e-b02a-9b07-30288488e2bf}">
+        <p14:section name="연습" id="{2703cabe-0e0e-da77-fb70-ef521e2011ad}">
           <p14:sldIdLst>
             <p14:sldId id="260"/>
             <p14:sldId id="263"/>
             <p14:sldId id="264"/>
           </p14:sldIdLst>
         </p14:section>
-        <p14:section name="개념" id="{34280aa6-81ef-88e2-cb01-a447b0f24f56}">
+        <p14:section name="개념" id="{a6d839c6-7276-b1b9-ce46-eeba989aa4ef}">
           <p14:sldIdLst/>
         </p14:section>
-        <p14:section name="연습" id="{eb71dbde-6e11-397b-acb4-74d361dade2f}">
+        <p14:section name="연습" id="{4a825268-b523-cb52-0f47-d65da34bd2d4}">
           <p14:sldIdLst/>
         </p14:section>
-        <p14:section name="확인" id="{89f7c0c6-7ff7-6a57-a54a-e0c32039b948}">
+        <p14:section name="확인" id="{f997a454-4634-912d-cde4-c176e33b8356}">
           <p14:sldIdLst>
             <p14:sldId id="265"/>
             <p14:sldId id="266"/>
           </p14:sldIdLst>
         </p14:section>
-        <p14:section name="정리" id="{44556bc3-71b0-b5eb-7c6d-1eec8b16ea18}">
+        <p14:section name="정리" id="{d12ed9a4-2ce9-28b5-902b-3a1a4cbf4926}">
           <p14:sldIdLst>
             <p14:sldId id="267"/>
           </p14:sldIdLst>
         </p14:section>
-        <p14:section name="보충" id="{863cc80d-330d-31b1-3c09-b0b43ff492c6}">
+        <p14:section name="보충" id="{fae163d4-04d5-3265-d74c-cd6bec21e829}">
           <p14:sldIdLst>
             <p14:sldId id="268"/>
           </p14:sldIdLst>
@@ -2775,7 +2775,7 @@
           </p:nvPr>
         </p:nvGraphicFramePr>
         <p:xfrm>
-          <a:off x="8001000" y="883920"/>
+          <a:off x="8001000" y="922020"/>
           <a:ext cx="3291840" cy="914400"/>
         </p:xfrm>
         <a:graphic>
@@ -2788,7 +2788,7 @@
                 <a:gridCol w="822960"/>
                 <a:gridCol w="822960"/>
               </a:tblGrid>
-              <a:tr h="609600">
+              <a:tr h="590550">
                 <a:tc>
                   <a:txBody>
                     <a:bodyPr/>
@@ -3051,7 +3051,7 @@
                   </a:tcPr>
                 </a:tc>
               </a:tr>
-              <a:tr h="609600">
+              <a:tr h="590550">
                 <a:tc>
                   <a:txBody>
                     <a:bodyPr/>
@@ -3303,7 +3303,7 @@
                   </a:tcPr>
                 </a:tc>
               </a:tr>
-              <a:tr h="609600">
+              <a:tr h="590550">
                 <a:tc>
                   <a:txBody>
                     <a:bodyPr/>
@@ -3566,7 +3566,7 @@
                   </a:tcPr>
                 </a:tc>
               </a:tr>
-              <a:tr h="609600">
+              <a:tr h="590550">
                 <a:tc>
                   <a:txBody>
                     <a:bodyPr/>
@@ -9866,7 +9866,7 @@
           </p:nvPr>
         </p:nvGraphicFramePr>
         <p:xfrm>
-          <a:off x="1979676" y="2241550"/>
+          <a:off x="1979676" y="2277110"/>
           <a:ext cx="8229600" cy="914400"/>
         </p:xfrm>
         <a:graphic>
@@ -9878,7 +9878,7 @@
                 <a:gridCol w="2139696"/>
                 <a:gridCol w="3456432"/>
               </a:tblGrid>
-              <a:tr h="568960">
+              <a:tr h="551180">
                 <a:tc>
                   <a:txBody>
                     <a:bodyPr/>
@@ -10084,7 +10084,7 @@
                   </a:tcPr>
                 </a:tc>
               </a:tr>
-              <a:tr h="568960">
+              <a:tr h="551180">
                 <a:tc>
                   <a:txBody>
                     <a:bodyPr/>
@@ -10279,7 +10279,7 @@
                   </a:tcPr>
                 </a:tc>
               </a:tr>
-              <a:tr h="568960">
+              <a:tr h="551180">
                 <a:tc>
                   <a:txBody>
                     <a:bodyPr/>
@@ -10485,7 +10485,7 @@
                   </a:tcPr>
                 </a:tc>
               </a:tr>
-              <a:tr h="568960">
+              <a:tr h="551180">
                 <a:tc>
                   <a:txBody>
                     <a:bodyPr/>
@@ -10932,7 +10932,7 @@
           </p:nvPr>
         </p:nvGraphicFramePr>
         <p:xfrm>
-          <a:off x="7757770" y="2346960"/>
+          <a:off x="7757770" y="2385060"/>
           <a:ext cx="3474720" cy="914400"/>
         </p:xfrm>
         <a:graphic>
@@ -10945,7 +10945,7 @@
                 <a:gridCol w="868680"/>
                 <a:gridCol w="868680"/>
               </a:tblGrid>
-              <a:tr h="609600">
+              <a:tr h="590550">
                 <a:tc>
                   <a:txBody>
                     <a:bodyPr/>
@@ -11208,7 +11208,7 @@
                   </a:tcPr>
                 </a:tc>
               </a:tr>
-              <a:tr h="609600">
+              <a:tr h="590550">
                 <a:tc>
                   <a:txBody>
                     <a:bodyPr/>
@@ -11460,7 +11460,7 @@
                   </a:tcPr>
                 </a:tc>
               </a:tr>
-              <a:tr h="609600">
+              <a:tr h="590550">
                 <a:tc>
                   <a:txBody>
                     <a:bodyPr/>
@@ -11723,7 +11723,7 @@
                   </a:tcPr>
                 </a:tc>
               </a:tr>
-              <a:tr h="609600">
+              <a:tr h="590550">
                 <a:tc>
                   <a:txBody>
                     <a:bodyPr/>
@@ -11998,7 +11998,7 @@
         </p:nvSpPr>
         <p:spPr>
           <a:xfrm>
-            <a:off x="548640" y="2578608"/>
+            <a:off x="548640" y="2388108"/>
             <a:ext cx="548640" cy="548640"/>
           </a:xfrm>
           <a:prstGeom prst="ellipse">
@@ -12043,7 +12043,7 @@
         </p:nvSpPr>
         <p:spPr>
           <a:xfrm>
-            <a:off x="1325880" y="2578608"/>
+            <a:off x="1325880" y="2388108"/>
             <a:ext cx="5658307" cy="548640"/>
           </a:xfrm>
           <a:prstGeom prst="rect">
@@ -12082,7 +12082,7 @@
         </p:nvSpPr>
         <p:spPr>
           <a:xfrm>
-            <a:off x="548640" y="3291840"/>
+            <a:off x="548640" y="3147060"/>
             <a:ext cx="548640" cy="548640"/>
           </a:xfrm>
           <a:prstGeom prst="ellipse">
@@ -12127,8 +12127,8 @@
         </p:nvSpPr>
         <p:spPr>
           <a:xfrm>
-            <a:off x="1325880" y="3291840"/>
-            <a:ext cx="5658307" cy="548640"/>
+            <a:off x="1325880" y="3101340"/>
+            <a:ext cx="5658307" cy="929640"/>
           </a:xfrm>
           <a:prstGeom prst="rect">
             <a:avLst/>
@@ -12166,7 +12166,7 @@
         </p:nvSpPr>
         <p:spPr>
           <a:xfrm>
-            <a:off x="548640" y="4005072"/>
+            <a:off x="548640" y="4195572"/>
             <a:ext cx="548640" cy="548640"/>
           </a:xfrm>
           <a:prstGeom prst="ellipse">
@@ -12211,7 +12211,7 @@
         </p:nvSpPr>
         <p:spPr>
           <a:xfrm>
-            <a:off x="1325880" y="4005072"/>
+            <a:off x="1325880" y="4195572"/>
             <a:ext cx="5658307" cy="548640"/>
           </a:xfrm>
           <a:prstGeom prst="rect">
@@ -17692,7 +17692,7 @@
           </p:nvPr>
         </p:nvGraphicFramePr>
         <p:xfrm>
-          <a:off x="7376190" y="2103120"/>
+          <a:off x="7376190" y="2030730"/>
           <a:ext cx="4023360" cy="914400"/>
         </p:xfrm>
         <a:graphic>
@@ -17705,7 +17705,7 @@
                 <a:gridCol w="1005840"/>
                 <a:gridCol w="1005840"/>
               </a:tblGrid>
-              <a:tr h="487680">
+              <a:tr h="511810">
                 <a:tc>
                   <a:txBody>
                     <a:bodyPr/>
@@ -17714,7 +17714,7 @@
                       <a:pPr eaLnBrk="0" algn="ctr" indent="0" marL="0">
                         <a:buNone/>
                       </a:pPr>
-                      <a:endParaRPr lang="en-US" sz="2400" dirty="0">
+                      <a:endParaRPr lang="en-US" sz="2600" dirty="0">
                         <a:latin typeface="맑은 고딕" charset="0"/>
                         <a:ea typeface="맑은 고딕" charset="0"/>
                         <a:cs typeface="맑은 고딕" charset="0"/>
@@ -17772,7 +17772,7 @@
                         <a:buNone/>
                       </a:pPr>
                       <a:r>
-                        <a:rPr lang="en-US" sz="2400" b="1" dirty="0">
+                        <a:rPr lang="en-US" sz="2600" b="1" dirty="0">
                           <a:solidFill>
                             <a:srgbClr val="1F2937"/>
                           </a:solidFill>
@@ -17782,7 +17782,7 @@
                         </a:rPr>
                         <a:t>백</a:t>
                       </a:r>
-                      <a:endParaRPr lang="en-US" sz="2400" dirty="0">
+                      <a:endParaRPr lang="en-US" sz="2600" dirty="0">
                         <a:latin typeface="맑은 고딕" charset="0"/>
                         <a:ea typeface="맑은 고딕" charset="0"/>
                         <a:cs typeface="맑은 고딕" charset="0"/>
@@ -17840,7 +17840,7 @@
                         <a:buNone/>
                       </a:pPr>
                       <a:r>
-                        <a:rPr lang="en-US" sz="2400" b="1" dirty="0">
+                        <a:rPr lang="en-US" sz="2600" b="1" dirty="0">
                           <a:solidFill>
                             <a:srgbClr val="1F2937"/>
                           </a:solidFill>
@@ -17850,7 +17850,7 @@
                         </a:rPr>
                         <a:t>십</a:t>
                       </a:r>
-                      <a:endParaRPr lang="en-US" sz="2400" dirty="0">
+                      <a:endParaRPr lang="en-US" sz="2600" dirty="0">
                         <a:latin typeface="맑은 고딕" charset="0"/>
                         <a:ea typeface="맑은 고딕" charset="0"/>
                         <a:cs typeface="맑은 고딕" charset="0"/>
@@ -17908,7 +17908,7 @@
                         <a:buNone/>
                       </a:pPr>
                       <a:r>
-                        <a:rPr lang="en-US" sz="2400" b="1" dirty="0">
+                        <a:rPr lang="en-US" sz="2600" b="1" dirty="0">
                           <a:solidFill>
                             <a:srgbClr val="1F2937"/>
                           </a:solidFill>
@@ -17918,7 +17918,7 @@
                         </a:rPr>
                         <a:t>일</a:t>
                       </a:r>
-                      <a:endParaRPr lang="en-US" sz="2400" dirty="0">
+                      <a:endParaRPr lang="en-US" sz="2600" dirty="0">
                         <a:latin typeface="맑은 고딕" charset="0"/>
                         <a:ea typeface="맑은 고딕" charset="0"/>
                         <a:cs typeface="맑은 고딕" charset="0"/>
@@ -17968,7 +17968,7 @@
                   </a:tcPr>
                 </a:tc>
               </a:tr>
-              <a:tr h="487680">
+              <a:tr h="511810">
                 <a:tc>
                   <a:txBody>
                     <a:bodyPr/>
@@ -17977,7 +17977,7 @@
                       <a:pPr eaLnBrk="0" algn="ctr" indent="0" marL="0">
                         <a:buNone/>
                       </a:pPr>
-                      <a:endParaRPr lang="en-US" sz="2400" dirty="0">
+                      <a:endParaRPr lang="en-US" sz="2600" dirty="0">
                         <a:latin typeface="맑은 고딕" charset="0"/>
                         <a:ea typeface="맑은 고딕" charset="0"/>
                         <a:cs typeface="맑은 고딕" charset="0"/>
@@ -18034,7 +18034,7 @@
                       <a:pPr eaLnBrk="0" algn="ctr" indent="0" marL="0">
                         <a:buNone/>
                       </a:pPr>
-                      <a:endParaRPr lang="en-US" sz="2400" dirty="0">
+                      <a:endParaRPr lang="en-US" sz="2600" dirty="0">
                         <a:latin typeface="맑은 고딕" charset="0"/>
                         <a:ea typeface="맑은 고딕" charset="0"/>
                         <a:cs typeface="맑은 고딕" charset="0"/>
@@ -18092,7 +18092,7 @@
                         <a:buNone/>
                       </a:pPr>
                       <a:r>
-                        <a:rPr lang="en-US" sz="2400" dirty="0">
+                        <a:rPr lang="en-US" sz="2600" dirty="0">
                           <a:solidFill>
                             <a:srgbClr val="1F2937"/>
                           </a:solidFill>
@@ -18102,7 +18102,7 @@
                         </a:rPr>
                         <a:t>2</a:t>
                       </a:r>
-                      <a:endParaRPr lang="en-US" sz="2400" dirty="0">
+                      <a:endParaRPr lang="en-US" sz="2600" dirty="0">
                         <a:latin typeface="맑은 고딕" charset="0"/>
                         <a:ea typeface="맑은 고딕" charset="0"/>
                         <a:cs typeface="맑은 고딕" charset="0"/>
@@ -18160,7 +18160,7 @@
                         <a:buNone/>
                       </a:pPr>
                       <a:r>
-                        <a:rPr lang="en-US" sz="2400" dirty="0">
+                        <a:rPr lang="en-US" sz="2600" dirty="0">
                           <a:solidFill>
                             <a:srgbClr val="1F2937"/>
                           </a:solidFill>
@@ -18170,7 +18170,7 @@
                         </a:rPr>
                         <a:t>4</a:t>
                       </a:r>
-                      <a:endParaRPr lang="en-US" sz="2400" dirty="0">
+                      <a:endParaRPr lang="en-US" sz="2600" dirty="0">
                         <a:latin typeface="맑은 고딕" charset="0"/>
                         <a:ea typeface="맑은 고딕" charset="0"/>
                         <a:cs typeface="맑은 고딕" charset="0"/>
@@ -18220,7 +18220,7 @@
                   </a:tcPr>
                 </a:tc>
               </a:tr>
-              <a:tr h="487680">
+              <a:tr h="511810">
                 <a:tc>
                   <a:txBody>
                     <a:bodyPr/>
@@ -18230,7 +18230,7 @@
                         <a:buNone/>
                       </a:pPr>
                       <a:r>
-                        <a:rPr lang="en-US" sz="2400" dirty="0">
+                        <a:rPr lang="en-US" sz="2600" dirty="0">
                           <a:solidFill>
                             <a:srgbClr val="1F2937"/>
                           </a:solidFill>
@@ -18240,7 +18240,7 @@
                         </a:rPr>
                         <a:t>×</a:t>
                       </a:r>
-                      <a:endParaRPr lang="en-US" sz="2400" dirty="0">
+                      <a:endParaRPr lang="en-US" sz="2600" dirty="0">
                         <a:latin typeface="맑은 고딕" charset="0"/>
                         <a:ea typeface="맑은 고딕" charset="0"/>
                         <a:cs typeface="맑은 고딕" charset="0"/>
@@ -18297,7 +18297,7 @@
                       <a:pPr eaLnBrk="0" algn="ctr" indent="0" marL="0">
                         <a:buNone/>
                       </a:pPr>
-                      <a:endParaRPr lang="en-US" sz="2400" dirty="0">
+                      <a:endParaRPr lang="en-US" sz="2600" dirty="0">
                         <a:latin typeface="맑은 고딕" charset="0"/>
                         <a:ea typeface="맑은 고딕" charset="0"/>
                         <a:cs typeface="맑은 고딕" charset="0"/>
@@ -18355,7 +18355,7 @@
                         <a:buNone/>
                       </a:pPr>
                       <a:r>
-                        <a:rPr lang="en-US" sz="2400" dirty="0">
+                        <a:rPr lang="en-US" sz="2600" dirty="0">
                           <a:solidFill>
                             <a:srgbClr val="1F2937"/>
                           </a:solidFill>
@@ -18365,7 +18365,7 @@
                         </a:rPr>
                         <a:t>1</a:t>
                       </a:r>
-                      <a:endParaRPr lang="en-US" sz="2400" dirty="0">
+                      <a:endParaRPr lang="en-US" sz="2600" dirty="0">
                         <a:latin typeface="맑은 고딕" charset="0"/>
                         <a:ea typeface="맑은 고딕" charset="0"/>
                         <a:cs typeface="맑은 고딕" charset="0"/>
@@ -18423,7 +18423,7 @@
                         <a:buNone/>
                       </a:pPr>
                       <a:r>
-                        <a:rPr lang="en-US" sz="2400" dirty="0">
+                        <a:rPr lang="en-US" sz="2600" dirty="0">
                           <a:solidFill>
                             <a:srgbClr val="1F2937"/>
                           </a:solidFill>
@@ -18433,7 +18433,7 @@
                         </a:rPr>
                         <a:t>3</a:t>
                       </a:r>
-                      <a:endParaRPr lang="en-US" sz="2400" dirty="0">
+                      <a:endParaRPr lang="en-US" sz="2600" dirty="0">
                         <a:latin typeface="맑은 고딕" charset="0"/>
                         <a:ea typeface="맑은 고딕" charset="0"/>
                         <a:cs typeface="맑은 고딕" charset="0"/>
@@ -18483,7 +18483,7 @@
                   </a:tcPr>
                 </a:tc>
               </a:tr>
-              <a:tr h="487680">
+              <a:tr h="511810">
                 <a:tc>
                   <a:txBody>
                     <a:bodyPr/>
@@ -18492,7 +18492,7 @@
                       <a:pPr eaLnBrk="0" algn="ctr" indent="0" marL="0">
                         <a:buNone/>
                       </a:pPr>
-                      <a:endParaRPr lang="en-US" sz="2400" dirty="0">
+                      <a:endParaRPr lang="en-US" sz="2600" dirty="0">
                         <a:latin typeface="맑은 고딕" charset="0"/>
                         <a:ea typeface="맑은 고딕" charset="0"/>
                         <a:cs typeface="맑은 고딕" charset="0"/>
@@ -18549,7 +18549,7 @@
                       <a:pPr eaLnBrk="0" algn="ctr" indent="0" marL="0">
                         <a:buNone/>
                       </a:pPr>
-                      <a:endParaRPr lang="en-US" sz="2400" dirty="0">
+                      <a:endParaRPr lang="en-US" sz="2600" dirty="0">
                         <a:latin typeface="맑은 고딕" charset="0"/>
                         <a:ea typeface="맑은 고딕" charset="0"/>
                         <a:cs typeface="맑은 고딕" charset="0"/>
@@ -18607,7 +18607,7 @@
                         <a:buNone/>
                       </a:pPr>
                       <a:r>
-                        <a:rPr lang="en-US" sz="2400" dirty="0">
+                        <a:rPr lang="en-US" sz="2600" dirty="0">
                           <a:solidFill>
                             <a:srgbClr val="1F2937"/>
                           </a:solidFill>
@@ -18617,7 +18617,7 @@
                         </a:rPr>
                         <a:t>7</a:t>
                       </a:r>
-                      <a:endParaRPr lang="en-US" sz="2400" dirty="0">
+                      <a:endParaRPr lang="en-US" sz="2600" dirty="0">
                         <a:latin typeface="맑은 고딕" charset="0"/>
                         <a:ea typeface="맑은 고딕" charset="0"/>
                         <a:cs typeface="맑은 고딕" charset="0"/>
@@ -18675,7 +18675,7 @@
                         <a:buNone/>
                       </a:pPr>
                       <a:r>
-                        <a:rPr lang="en-US" sz="2400" dirty="0">
+                        <a:rPr lang="en-US" sz="2600" dirty="0">
                           <a:solidFill>
                             <a:srgbClr val="1F2937"/>
                           </a:solidFill>
@@ -18685,7 +18685,7 @@
                         </a:rPr>
                         <a:t>2</a:t>
                       </a:r>
-                      <a:endParaRPr lang="en-US" sz="2400" dirty="0">
+                      <a:endParaRPr lang="en-US" sz="2600" dirty="0">
                         <a:latin typeface="맑은 고딕" charset="0"/>
                         <a:ea typeface="맑은 고딕" charset="0"/>
                         <a:cs typeface="맑은 고딕" charset="0"/>
@@ -18735,7 +18735,7 @@
                   </a:tcPr>
                 </a:tc>
               </a:tr>
-              <a:tr h="487680">
+              <a:tr h="511810">
                 <a:tc>
                   <a:txBody>
                     <a:bodyPr/>
@@ -18744,7 +18744,7 @@
                       <a:pPr eaLnBrk="0" algn="ctr" indent="0" marL="0">
                         <a:buNone/>
                       </a:pPr>
-                      <a:endParaRPr lang="en-US" sz="2400" dirty="0">
+                      <a:endParaRPr lang="en-US" sz="2600" dirty="0">
                         <a:latin typeface="맑은 고딕" charset="0"/>
                         <a:ea typeface="맑은 고딕" charset="0"/>
                         <a:cs typeface="맑은 고딕" charset="0"/>
@@ -18802,7 +18802,7 @@
                         <a:buNone/>
                       </a:pPr>
                       <a:r>
-                        <a:rPr lang="en-US" sz="2400" dirty="0">
+                        <a:rPr lang="en-US" sz="2600" dirty="0">
                           <a:solidFill>
                             <a:srgbClr val="1F2937"/>
                           </a:solidFill>
@@ -18812,7 +18812,7 @@
                         </a:rPr>
                         <a:t>2</a:t>
                       </a:r>
-                      <a:endParaRPr lang="en-US" sz="2400" dirty="0">
+                      <a:endParaRPr lang="en-US" sz="2600" dirty="0">
                         <a:latin typeface="맑은 고딕" charset="0"/>
                         <a:ea typeface="맑은 고딕" charset="0"/>
                         <a:cs typeface="맑은 고딕" charset="0"/>
@@ -18870,7 +18870,7 @@
                         <a:buNone/>
                       </a:pPr>
                       <a:r>
-                        <a:rPr lang="en-US" sz="2400" dirty="0">
+                        <a:rPr lang="en-US" sz="2600" dirty="0">
                           <a:solidFill>
                             <a:srgbClr val="1F2937"/>
                           </a:solidFill>
@@ -18880,7 +18880,7 @@
                         </a:rPr>
                         <a:t>4</a:t>
                       </a:r>
-                      <a:endParaRPr lang="en-US" sz="2400" dirty="0">
+                      <a:endParaRPr lang="en-US" sz="2600" dirty="0">
                         <a:latin typeface="맑은 고딕" charset="0"/>
                         <a:ea typeface="맑은 고딕" charset="0"/>
                         <a:cs typeface="맑은 고딕" charset="0"/>
@@ -18938,7 +18938,7 @@
                         <a:buNone/>
                       </a:pPr>
                       <a:r>
-                        <a:rPr lang="en-US" sz="2400" dirty="0">
+                        <a:rPr lang="en-US" sz="2600" dirty="0">
                           <a:solidFill>
                             <a:srgbClr val="1F2937"/>
                           </a:solidFill>
@@ -18948,7 +18948,7 @@
                         </a:rPr>
                         <a:t>0</a:t>
                       </a:r>
-                      <a:endParaRPr lang="en-US" sz="2400" dirty="0">
+                      <a:endParaRPr lang="en-US" sz="2600" dirty="0">
                         <a:latin typeface="맑은 고딕" charset="0"/>
                         <a:ea typeface="맑은 고딕" charset="0"/>
                         <a:cs typeface="맑은 고딕" charset="0"/>
@@ -18998,7 +18998,7 @@
                   </a:tcPr>
                 </a:tc>
               </a:tr>
-              <a:tr h="487680">
+              <a:tr h="511810">
                 <a:tc>
                   <a:txBody>
                     <a:bodyPr/>
@@ -19007,7 +19007,7 @@
                       <a:pPr eaLnBrk="0" algn="ctr" indent="0" marL="0">
                         <a:buNone/>
                       </a:pPr>
-                      <a:endParaRPr lang="en-US" sz="2400" dirty="0">
+                      <a:endParaRPr lang="en-US" sz="2600" dirty="0">
                         <a:latin typeface="맑은 고딕" charset="0"/>
                         <a:ea typeface="맑은 고딕" charset="0"/>
                         <a:cs typeface="맑은 고딕" charset="0"/>
@@ -19065,7 +19065,7 @@
                         <a:buNone/>
                       </a:pPr>
                       <a:r>
-                        <a:rPr lang="en-US" sz="2400" dirty="0">
+                        <a:rPr lang="en-US" sz="2600" dirty="0">
                           <a:solidFill>
                             <a:srgbClr val="1F2937"/>
                           </a:solidFill>
@@ -19075,7 +19075,7 @@
                         </a:rPr>
                         <a:t>3</a:t>
                       </a:r>
-                      <a:endParaRPr lang="en-US" sz="2400" dirty="0">
+                      <a:endParaRPr lang="en-US" sz="2600" dirty="0">
                         <a:latin typeface="맑은 고딕" charset="0"/>
                         <a:ea typeface="맑은 고딕" charset="0"/>
                         <a:cs typeface="맑은 고딕" charset="0"/>
@@ -19133,7 +19133,7 @@
                         <a:buNone/>
                       </a:pPr>
                       <a:r>
-                        <a:rPr lang="en-US" sz="2400" dirty="0">
+                        <a:rPr lang="en-US" sz="2600" dirty="0">
                           <a:solidFill>
                             <a:srgbClr val="1F2937"/>
                           </a:solidFill>
@@ -19143,7 +19143,7 @@
                         </a:rPr>
                         <a:t>1</a:t>
                       </a:r>
-                      <a:endParaRPr lang="en-US" sz="2400" dirty="0">
+                      <a:endParaRPr lang="en-US" sz="2600" dirty="0">
                         <a:latin typeface="맑은 고딕" charset="0"/>
                         <a:ea typeface="맑은 고딕" charset="0"/>
                         <a:cs typeface="맑은 고딕" charset="0"/>
@@ -19201,7 +19201,7 @@
                         <a:buNone/>
                       </a:pPr>
                       <a:r>
-                        <a:rPr lang="en-US" sz="2400" dirty="0">
+                        <a:rPr lang="en-US" sz="2600" dirty="0">
                           <a:solidFill>
                             <a:srgbClr val="1F2937"/>
                           </a:solidFill>
@@ -19211,7 +19211,7 @@
                         </a:rPr>
                         <a:t>2</a:t>
                       </a:r>
-                      <a:endParaRPr lang="en-US" sz="2400" dirty="0">
+                      <a:endParaRPr lang="en-US" sz="2600" dirty="0">
                         <a:latin typeface="맑은 고딕" charset="0"/>
                         <a:ea typeface="맑은 고딕" charset="0"/>
                         <a:cs typeface="맑은 고딕" charset="0"/>
@@ -19805,7 +19805,7 @@
           </p:nvPr>
         </p:nvGraphicFramePr>
         <p:xfrm>
-          <a:off x="7312914" y="2104644"/>
+          <a:off x="7312914" y="2044319"/>
           <a:ext cx="3291840" cy="914400"/>
         </p:xfrm>
         <a:graphic>
@@ -19818,7 +19818,7 @@
                 <a:gridCol w="822960"/>
                 <a:gridCol w="822960"/>
               </a:tblGrid>
-              <a:tr h="487680">
+              <a:tr h="511810">
                 <a:tc>
                   <a:txBody>
                     <a:bodyPr/>
@@ -19827,7 +19827,7 @@
                       <a:pPr eaLnBrk="0" algn="ctr" indent="0" marL="0">
                         <a:buNone/>
                       </a:pPr>
-                      <a:endParaRPr lang="en-US" sz="2400" dirty="0">
+                      <a:endParaRPr lang="en-US" sz="2600" dirty="0">
                         <a:latin typeface="맑은 고딕" charset="0"/>
                         <a:ea typeface="맑은 고딕" charset="0"/>
                         <a:cs typeface="맑은 고딕" charset="0"/>
@@ -19884,7 +19884,7 @@
                       <a:pPr eaLnBrk="0" algn="ctr" indent="0" marL="0">
                         <a:buNone/>
                       </a:pPr>
-                      <a:endParaRPr lang="en-US" sz="2400" dirty="0">
+                      <a:endParaRPr lang="en-US" sz="2600" dirty="0">
                         <a:latin typeface="맑은 고딕" charset="0"/>
                         <a:ea typeface="맑은 고딕" charset="0"/>
                         <a:cs typeface="맑은 고딕" charset="0"/>
@@ -19942,7 +19942,7 @@
                         <a:buNone/>
                       </a:pPr>
                       <a:r>
-                        <a:rPr lang="en-US" sz="2400" dirty="0">
+                        <a:rPr lang="en-US" sz="2600" dirty="0">
                           <a:solidFill>
                             <a:srgbClr val="1F2937"/>
                           </a:solidFill>
@@ -19952,7 +19952,7 @@
                         </a:rPr>
                         <a:t>2</a:t>
                       </a:r>
-                      <a:endParaRPr lang="en-US" sz="2400" dirty="0">
+                      <a:endParaRPr lang="en-US" sz="2600" dirty="0">
                         <a:latin typeface="맑은 고딕" charset="0"/>
                         <a:ea typeface="맑은 고딕" charset="0"/>
                         <a:cs typeface="맑은 고딕" charset="0"/>
@@ -20010,7 +20010,7 @@
                         <a:buNone/>
                       </a:pPr>
                       <a:r>
-                        <a:rPr lang="en-US" sz="2400" dirty="0">
+                        <a:rPr lang="en-US" sz="2600" dirty="0">
                           <a:solidFill>
                             <a:srgbClr val="1F2937"/>
                           </a:solidFill>
@@ -20020,7 +20020,7 @@
                         </a:rPr>
                         <a:t>1</a:t>
                       </a:r>
-                      <a:endParaRPr lang="en-US" sz="2400" dirty="0">
+                      <a:endParaRPr lang="en-US" sz="2600" dirty="0">
                         <a:latin typeface="맑은 고딕" charset="0"/>
                         <a:ea typeface="맑은 고딕" charset="0"/>
                         <a:cs typeface="맑은 고딕" charset="0"/>
@@ -20070,7 +20070,7 @@
                   </a:tcPr>
                 </a:tc>
               </a:tr>
-              <a:tr h="487680">
+              <a:tr h="511810">
                 <a:tc>
                   <a:txBody>
                     <a:bodyPr/>
@@ -20080,7 +20080,7 @@
                         <a:buNone/>
                       </a:pPr>
                       <a:r>
-                        <a:rPr lang="en-US" sz="2400" dirty="0">
+                        <a:rPr lang="en-US" sz="2600" dirty="0">
                           <a:solidFill>
                             <a:srgbClr val="1F2937"/>
                           </a:solidFill>
@@ -20090,7 +20090,7 @@
                         </a:rPr>
                         <a:t>×</a:t>
                       </a:r>
-                      <a:endParaRPr lang="en-US" sz="2400" dirty="0">
+                      <a:endParaRPr lang="en-US" sz="2600" dirty="0">
                         <a:latin typeface="맑은 고딕" charset="0"/>
                         <a:ea typeface="맑은 고딕" charset="0"/>
                         <a:cs typeface="맑은 고딕" charset="0"/>
@@ -20147,7 +20147,7 @@
                       <a:pPr eaLnBrk="0" algn="ctr" indent="0" marL="0">
                         <a:buNone/>
                       </a:pPr>
-                      <a:endParaRPr lang="en-US" sz="2400" dirty="0">
+                      <a:endParaRPr lang="en-US" sz="2600" dirty="0">
                         <a:latin typeface="맑은 고딕" charset="0"/>
                         <a:ea typeface="맑은 고딕" charset="0"/>
                         <a:cs typeface="맑은 고딕" charset="0"/>
@@ -20205,7 +20205,7 @@
                         <a:buNone/>
                       </a:pPr>
                       <a:r>
-                        <a:rPr lang="en-US" sz="2400" dirty="0">
+                        <a:rPr lang="en-US" sz="2600" dirty="0">
                           <a:solidFill>
                             <a:srgbClr val="1F2937"/>
                           </a:solidFill>
@@ -20215,7 +20215,7 @@
                         </a:rPr>
                         <a:t>3</a:t>
                       </a:r>
-                      <a:endParaRPr lang="en-US" sz="2400" dirty="0">
+                      <a:endParaRPr lang="en-US" sz="2600" dirty="0">
                         <a:latin typeface="맑은 고딕" charset="0"/>
                         <a:ea typeface="맑은 고딕" charset="0"/>
                         <a:cs typeface="맑은 고딕" charset="0"/>
@@ -20273,7 +20273,7 @@
                         <a:buNone/>
                       </a:pPr>
                       <a:r>
-                        <a:rPr lang="en-US" sz="2400" dirty="0">
+                        <a:rPr lang="en-US" sz="2600" dirty="0">
                           <a:solidFill>
                             <a:srgbClr val="1F2937"/>
                           </a:solidFill>
@@ -20283,7 +20283,7 @@
                         </a:rPr>
                         <a:t>4</a:t>
                       </a:r>
-                      <a:endParaRPr lang="en-US" sz="2400" dirty="0">
+                      <a:endParaRPr lang="en-US" sz="2600" dirty="0">
                         <a:latin typeface="맑은 고딕" charset="0"/>
                         <a:ea typeface="맑은 고딕" charset="0"/>
                         <a:cs typeface="맑은 고딕" charset="0"/>
@@ -20333,7 +20333,7 @@
                   </a:tcPr>
                 </a:tc>
               </a:tr>
-              <a:tr h="487680">
+              <a:tr h="511810">
                 <a:tc>
                   <a:txBody>
                     <a:bodyPr/>
@@ -20342,7 +20342,7 @@
                       <a:pPr eaLnBrk="0" algn="ctr" indent="0" marL="0">
                         <a:buNone/>
                       </a:pPr>
-                      <a:endParaRPr lang="en-US" sz="2400" dirty="0">
+                      <a:endParaRPr lang="en-US" sz="2600" dirty="0">
                         <a:latin typeface="맑은 고딕" charset="0"/>
                         <a:ea typeface="맑은 고딕" charset="0"/>
                         <a:cs typeface="맑은 고딕" charset="0"/>
@@ -20399,7 +20399,7 @@
                       <a:pPr eaLnBrk="0" algn="ctr" indent="0" marL="0">
                         <a:buNone/>
                       </a:pPr>
-                      <a:endParaRPr lang="en-US" sz="2400" dirty="0">
+                      <a:endParaRPr lang="en-US" sz="2600" dirty="0">
                         <a:latin typeface="맑은 고딕" charset="0"/>
                         <a:ea typeface="맑은 고딕" charset="0"/>
                         <a:cs typeface="맑은 고딕" charset="0"/>
@@ -20457,7 +20457,7 @@
                         <a:buNone/>
                       </a:pPr>
                       <a:r>
-                        <a:rPr lang="en-US" sz="2400" dirty="0">
+                        <a:rPr lang="en-US" sz="2600" dirty="0">
                           <a:solidFill>
                             <a:srgbClr val="1F2937"/>
                           </a:solidFill>
@@ -20467,7 +20467,7 @@
                         </a:rPr>
                         <a:t>□</a:t>
                       </a:r>
-                      <a:endParaRPr lang="en-US" sz="2400" dirty="0">
+                      <a:endParaRPr lang="en-US" sz="2600" dirty="0">
                         <a:latin typeface="맑은 고딕" charset="0"/>
                         <a:ea typeface="맑은 고딕" charset="0"/>
                         <a:cs typeface="맑은 고딕" charset="0"/>
@@ -20525,7 +20525,7 @@
                         <a:buNone/>
                       </a:pPr>
                       <a:r>
-                        <a:rPr lang="en-US" sz="2400" dirty="0">
+                        <a:rPr lang="en-US" sz="2600" dirty="0">
                           <a:solidFill>
                             <a:srgbClr val="1F2937"/>
                           </a:solidFill>
@@ -20535,7 +20535,7 @@
                         </a:rPr>
                         <a:t>□</a:t>
                       </a:r>
-                      <a:endParaRPr lang="en-US" sz="2400" dirty="0">
+                      <a:endParaRPr lang="en-US" sz="2600" dirty="0">
                         <a:latin typeface="맑은 고딕" charset="0"/>
                         <a:ea typeface="맑은 고딕" charset="0"/>
                         <a:cs typeface="맑은 고딕" charset="0"/>
@@ -20585,7 +20585,7 @@
                   </a:tcPr>
                 </a:tc>
               </a:tr>
-              <a:tr h="487680">
+              <a:tr h="511810">
                 <a:tc>
                   <a:txBody>
                     <a:bodyPr/>
@@ -20594,7 +20594,7 @@
                       <a:pPr eaLnBrk="0" algn="ctr" indent="0" marL="0">
                         <a:buNone/>
                       </a:pPr>
-                      <a:endParaRPr lang="en-US" sz="2400" dirty="0">
+                      <a:endParaRPr lang="en-US" sz="2600" dirty="0">
                         <a:latin typeface="맑은 고딕" charset="0"/>
                         <a:ea typeface="맑은 고딕" charset="0"/>
                         <a:cs typeface="맑은 고딕" charset="0"/>
@@ -20652,7 +20652,7 @@
                         <a:buNone/>
                       </a:pPr>
                       <a:r>
-                        <a:rPr lang="en-US" sz="2400" dirty="0">
+                        <a:rPr lang="en-US" sz="2600" dirty="0">
                           <a:solidFill>
                             <a:srgbClr val="1F2937"/>
                           </a:solidFill>
@@ -20662,7 +20662,7 @@
                         </a:rPr>
                         <a:t>□</a:t>
                       </a:r>
-                      <a:endParaRPr lang="en-US" sz="2400" dirty="0">
+                      <a:endParaRPr lang="en-US" sz="2600" dirty="0">
                         <a:latin typeface="맑은 고딕" charset="0"/>
                         <a:ea typeface="맑은 고딕" charset="0"/>
                         <a:cs typeface="맑은 고딕" charset="0"/>
@@ -20720,7 +20720,7 @@
                         <a:buNone/>
                       </a:pPr>
                       <a:r>
-                        <a:rPr lang="en-US" sz="2400" dirty="0">
+                        <a:rPr lang="en-US" sz="2600" dirty="0">
                           <a:solidFill>
                             <a:srgbClr val="1F2937"/>
                           </a:solidFill>
@@ -20730,7 +20730,7 @@
                         </a:rPr>
                         <a:t>□</a:t>
                       </a:r>
-                      <a:endParaRPr lang="en-US" sz="2400" dirty="0">
+                      <a:endParaRPr lang="en-US" sz="2600" dirty="0">
                         <a:latin typeface="맑은 고딕" charset="0"/>
                         <a:ea typeface="맑은 고딕" charset="0"/>
                         <a:cs typeface="맑은 고딕" charset="0"/>
@@ -20788,7 +20788,7 @@
                         <a:buNone/>
                       </a:pPr>
                       <a:r>
-                        <a:rPr lang="en-US" sz="2400" dirty="0">
+                        <a:rPr lang="en-US" sz="2600" dirty="0">
                           <a:solidFill>
                             <a:srgbClr val="1F2937"/>
                           </a:solidFill>
@@ -20798,7 +20798,7 @@
                         </a:rPr>
                         <a:t>□</a:t>
                       </a:r>
-                      <a:endParaRPr lang="en-US" sz="2400" dirty="0">
+                      <a:endParaRPr lang="en-US" sz="2600" dirty="0">
                         <a:latin typeface="맑은 고딕" charset="0"/>
                         <a:ea typeface="맑은 고딕" charset="0"/>
                         <a:cs typeface="맑은 고딕" charset="0"/>
@@ -20848,7 +20848,7 @@
                   </a:tcPr>
                 </a:tc>
               </a:tr>
-              <a:tr h="487680">
+              <a:tr h="511810">
                 <a:tc>
                   <a:txBody>
                     <a:bodyPr/>
@@ -20857,7 +20857,7 @@
                       <a:pPr eaLnBrk="0" algn="ctr" indent="0" marL="0">
                         <a:buNone/>
                       </a:pPr>
-                      <a:endParaRPr lang="en-US" sz="2400" dirty="0">
+                      <a:endParaRPr lang="en-US" sz="2600" dirty="0">
                         <a:latin typeface="맑은 고딕" charset="0"/>
                         <a:ea typeface="맑은 고딕" charset="0"/>
                         <a:cs typeface="맑은 고딕" charset="0"/>
@@ -20915,7 +20915,7 @@
                         <a:buNone/>
                       </a:pPr>
                       <a:r>
-                        <a:rPr lang="en-US" sz="2400" dirty="0">
+                        <a:rPr lang="en-US" sz="2600" dirty="0">
                           <a:solidFill>
                             <a:srgbClr val="1F2937"/>
                           </a:solidFill>
@@ -20925,7 +20925,7 @@
                         </a:rPr>
                         <a:t>□</a:t>
                       </a:r>
-                      <a:endParaRPr lang="en-US" sz="2400" dirty="0">
+                      <a:endParaRPr lang="en-US" sz="2600" dirty="0">
                         <a:latin typeface="맑은 고딕" charset="0"/>
                         <a:ea typeface="맑은 고딕" charset="0"/>
                         <a:cs typeface="맑은 고딕" charset="0"/>
@@ -20983,7 +20983,7 @@
                         <a:buNone/>
                       </a:pPr>
                       <a:r>
-                        <a:rPr lang="en-US" sz="2400" dirty="0">
+                        <a:rPr lang="en-US" sz="2600" dirty="0">
                           <a:solidFill>
                             <a:srgbClr val="1F2937"/>
                           </a:solidFill>
@@ -20993,7 +20993,7 @@
                         </a:rPr>
                         <a:t>□</a:t>
                       </a:r>
-                      <a:endParaRPr lang="en-US" sz="2400" dirty="0">
+                      <a:endParaRPr lang="en-US" sz="2600" dirty="0">
                         <a:latin typeface="맑은 고딕" charset="0"/>
                         <a:ea typeface="맑은 고딕" charset="0"/>
                         <a:cs typeface="맑은 고딕" charset="0"/>
@@ -21051,7 +21051,7 @@
                         <a:buNone/>
                       </a:pPr>
                       <a:r>
-                        <a:rPr lang="en-US" sz="2400" dirty="0">
+                        <a:rPr lang="en-US" sz="2600" dirty="0">
                           <a:solidFill>
                             <a:srgbClr val="1F2937"/>
                           </a:solidFill>
@@ -21061,7 +21061,7 @@
                         </a:rPr>
                         <a:t>□</a:t>
                       </a:r>
-                      <a:endParaRPr lang="en-US" sz="2400" dirty="0">
+                      <a:endParaRPr lang="en-US" sz="2600" dirty="0">
                         <a:latin typeface="맑은 고딕" charset="0"/>
                         <a:ea typeface="맑은 고딕" charset="0"/>
                         <a:cs typeface="맑은 고딕" charset="0"/>
